--- a/2.HTML.pptx
+++ b/2.HTML.pptx
@@ -312,10 +312,17 @@
   <pc:docChgLst>
     <pc:chgData name="Rahim Huseynov" userId="5c75ed6757465dfb" providerId="LiveId" clId="{EA42048A-7C5B-48D4-905B-44B28AA2696E}"/>
     <pc:docChg chg="undo custSel addSld delSld modSld sldOrd">
-      <pc:chgData name="Rahim Huseynov" userId="5c75ed6757465dfb" providerId="LiveId" clId="{EA42048A-7C5B-48D4-905B-44B28AA2696E}" dt="2026-09-14T14:18:24.070" v="3"/>
+      <pc:chgData name="Rahim Huseynov" userId="5c75ed6757465dfb" providerId="LiveId" clId="{EA42048A-7C5B-48D4-905B-44B28AA2696E}" dt="2026-09-15T15:05:18.887" v="5"/>
       <pc:docMkLst>
         <pc:docMk/>
       </pc:docMkLst>
+      <pc:sldChg chg="ord">
+        <pc:chgData name="Rahim Huseynov" userId="5c75ed6757465dfb" providerId="LiveId" clId="{EA42048A-7C5B-48D4-905B-44B28AA2696E}" dt="2026-09-15T15:05:18.887" v="5"/>
+        <pc:sldMkLst>
+          <pc:docMk/>
+          <pc:sldMk cId="0" sldId="265"/>
+        </pc:sldMkLst>
+      </pc:sldChg>
       <pc:sldChg chg="ord">
         <pc:chgData name="Rahim Huseynov" userId="5c75ed6757465dfb" providerId="LiveId" clId="{EA42048A-7C5B-48D4-905B-44B28AA2696E}" dt="2026-09-14T14:18:24.070" v="3"/>
         <pc:sldMkLst>
@@ -11448,7 +11455,7 @@
         </p:nvGraphicFramePr>
         <p:xfrm>
           <a:off x="361800" y="1630440"/>
-          <a:ext cx="5430950" cy="512074"/>
+          <a:ext cx="5430950" cy="483436"/>
         </p:xfrm>
         <a:graphic>
           <a:graphicData uri="http://schemas.openxmlformats.org/drawingml/2006/table">
@@ -29263,7 +29270,7 @@
         </p:nvGraphicFramePr>
         <p:xfrm>
           <a:off x="2980440" y="3203640"/>
-          <a:ext cx="3171950" cy="512074"/>
+          <a:ext cx="3171950" cy="483436"/>
         </p:xfrm>
         <a:graphic>
           <a:graphicData uri="http://schemas.openxmlformats.org/drawingml/2006/table">
